--- a/public/fun/cards/teacher/teacher-43.pptx
+++ b/public/fun/cards/teacher/teacher-43.pptx
@@ -3085,7 +3085,7 @@
     <p:bg>
       <p:bgPr>
         <a:solidFill>
-          <a:srgbClr val="FFFFFF"/>
+          <a:srgbClr val="FFF4F8"/>
         </a:solidFill>
         <a:effectLst/>
       </p:bgPr>
@@ -3099,20 +3099,20 @@
       <p:grpSpPr/>
       <p:sp>
         <p:nvSpPr>
-          <p:cNvPr id="2" name="Rectangle 1"/>
+          <p:cNvPr id="2" name="Oval 1"/>
           <p:cNvSpPr/>
           <p:nvPr/>
         </p:nvSpPr>
         <p:spPr>
           <a:xfrm>
-            <a:off x="0" y="0"/>
-            <a:ext cx="3240000" cy="720000"/>
+            <a:off x="547200" y="475200"/>
+            <a:ext cx="849600" cy="849600"/>
           </a:xfrm>
-          <a:prstGeom prst="rect">
+          <a:prstGeom prst="ellipse">
             <a:avLst/>
           </a:prstGeom>
           <a:solidFill>
-            <a:srgbClr val="5D9640"/>
+            <a:srgbClr val="FFE6EF"/>
           </a:solidFill>
           <a:ln>
             <a:noFill/>
@@ -3134,14 +3134,16 @@
         </p:nvSpPr>
         <p:spPr>
           <a:xfrm>
-            <a:off x="2767968" y="283968"/>
-            <a:ext cx="152064" cy="152064"/>
+            <a:off x="187200" y="475200"/>
+            <a:ext cx="849600" cy="849600"/>
           </a:xfrm>
           <a:prstGeom prst="ellipse">
             <a:avLst/>
           </a:prstGeom>
           <a:solidFill>
-            <a:srgbClr val="FFFFFF"/>
+            <a:srgbClr val="FF8FB8">
+              <a:alpha val="92000"/>
+            </a:srgbClr>
           </a:solidFill>
           <a:ln>
             <a:noFill/>
@@ -3155,184 +3157,16 @@
           </a:p>
         </p:txBody>
       </p:sp>
-      <p:cxnSp>
-        <p:nvCxnSpPr>
-          <p:cNvPr id="4" name="Connector 3"/>
-          <p:cNvCxnSpPr/>
+      <p:sp>
+        <p:nvSpPr>
+          <p:cNvPr id="4" name="텍스트"/>
+          <p:cNvSpPr txBox="1"/>
           <p:nvPr/>
-        </p:nvCxnSpPr>
+        </p:nvSpPr>
         <p:spPr>
           <a:xfrm>
-            <a:off x="2954592" y="360000"/>
-            <a:ext cx="48384" cy="0"/>
-          </a:xfrm>
-          <a:prstGeom prst="line">
-            <a:avLst/>
-          </a:prstGeom>
-          <a:ln w="20736">
-            <a:solidFill>
-              <a:srgbClr val="808080"/>
-            </a:solidFill>
-          </a:ln>
-        </p:spPr>
-      </p:cxnSp>
-      <p:cxnSp>
-        <p:nvCxnSpPr>
-          <p:cNvPr id="5" name="Connector 4"/>
-          <p:cNvCxnSpPr/>
-          <p:nvPr/>
-        </p:nvCxnSpPr>
-        <p:spPr>
-          <a:xfrm>
-            <a:off x="2922200" y="438200"/>
-            <a:ext cx="34213" cy="34213"/>
-          </a:xfrm>
-          <a:prstGeom prst="line">
-            <a:avLst/>
-          </a:prstGeom>
-          <a:ln w="20736">
-            <a:solidFill>
-              <a:srgbClr val="808080"/>
-            </a:solidFill>
-          </a:ln>
-        </p:spPr>
-      </p:cxnSp>
-      <p:cxnSp>
-        <p:nvCxnSpPr>
-          <p:cNvPr id="6" name="Connector 5"/>
-          <p:cNvCxnSpPr/>
-          <p:nvPr/>
-        </p:nvCxnSpPr>
-        <p:spPr>
-          <a:xfrm>
-            <a:off x="2844000" y="470592"/>
-            <a:ext cx="0" cy="48384"/>
-          </a:xfrm>
-          <a:prstGeom prst="line">
-            <a:avLst/>
-          </a:prstGeom>
-          <a:ln w="20736">
-            <a:solidFill>
-              <a:srgbClr val="808080"/>
-            </a:solidFill>
-          </a:ln>
-        </p:spPr>
-      </p:cxnSp>
-      <p:cxnSp>
-        <p:nvCxnSpPr>
-          <p:cNvPr id="7" name="Connector 6"/>
-          <p:cNvCxnSpPr/>
-          <p:nvPr/>
-        </p:nvCxnSpPr>
-        <p:spPr>
-          <a:xfrm flipH="1">
-            <a:off x="2731587" y="438200"/>
-            <a:ext cx="34213" cy="34213"/>
-          </a:xfrm>
-          <a:prstGeom prst="line">
-            <a:avLst/>
-          </a:prstGeom>
-          <a:ln w="20736">
-            <a:solidFill>
-              <a:srgbClr val="808080"/>
-            </a:solidFill>
-          </a:ln>
-        </p:spPr>
-      </p:cxnSp>
-      <p:cxnSp>
-        <p:nvCxnSpPr>
-          <p:cNvPr id="8" name="Connector 7"/>
-          <p:cNvCxnSpPr/>
-          <p:nvPr/>
-        </p:nvCxnSpPr>
-        <p:spPr>
-          <a:xfrm flipH="1">
-            <a:off x="2685024" y="360000"/>
-            <a:ext cx="48384" cy="0"/>
-          </a:xfrm>
-          <a:prstGeom prst="line">
-            <a:avLst/>
-          </a:prstGeom>
-          <a:ln w="20736">
-            <a:solidFill>
-              <a:srgbClr val="808080"/>
-            </a:solidFill>
-          </a:ln>
-        </p:spPr>
-      </p:cxnSp>
-      <p:cxnSp>
-        <p:nvCxnSpPr>
-          <p:cNvPr id="9" name="Connector 8"/>
-          <p:cNvCxnSpPr/>
-          <p:nvPr/>
-        </p:nvCxnSpPr>
-        <p:spPr>
-          <a:xfrm flipH="1" flipV="1">
-            <a:off x="2731587" y="247587"/>
-            <a:ext cx="34213" cy="34213"/>
-          </a:xfrm>
-          <a:prstGeom prst="line">
-            <a:avLst/>
-          </a:prstGeom>
-          <a:ln w="20736">
-            <a:solidFill>
-              <a:srgbClr val="808080"/>
-            </a:solidFill>
-          </a:ln>
-        </p:spPr>
-      </p:cxnSp>
-      <p:cxnSp>
-        <p:nvCxnSpPr>
-          <p:cNvPr id="10" name="Connector 9"/>
-          <p:cNvCxnSpPr/>
-          <p:nvPr/>
-        </p:nvCxnSpPr>
-        <p:spPr>
-          <a:xfrm flipV="1">
-            <a:off x="2844000" y="201024"/>
-            <a:ext cx="0" cy="48384"/>
-          </a:xfrm>
-          <a:prstGeom prst="line">
-            <a:avLst/>
-          </a:prstGeom>
-          <a:ln w="20736">
-            <a:solidFill>
-              <a:srgbClr val="808080"/>
-            </a:solidFill>
-          </a:ln>
-        </p:spPr>
-      </p:cxnSp>
-      <p:cxnSp>
-        <p:nvCxnSpPr>
-          <p:cNvPr id="11" name="Connector 10"/>
-          <p:cNvCxnSpPr/>
-          <p:nvPr/>
-        </p:nvCxnSpPr>
-        <p:spPr>
-          <a:xfrm flipV="1">
-            <a:off x="2922200" y="247587"/>
-            <a:ext cx="34213" cy="34213"/>
-          </a:xfrm>
-          <a:prstGeom prst="line">
-            <a:avLst/>
-          </a:prstGeom>
-          <a:ln w="20736">
-            <a:solidFill>
-              <a:srgbClr val="808080"/>
-            </a:solidFill>
-          </a:ln>
-        </p:spPr>
-      </p:cxnSp>
-      <p:sp>
-        <p:nvSpPr>
-          <p:cNvPr id="12" name="텍스트"/>
-          <p:cNvSpPr txBox="1"/>
-          <p:nvPr/>
-        </p:nvSpPr>
-        <p:spPr>
-          <a:xfrm>
-            <a:off x="230400" y="187200"/>
-            <a:ext cx="2160000" cy="305437"/>
+            <a:off x="1692000" y="223200"/>
+            <a:ext cx="1296000" cy="133351"/>
           </a:xfrm>
           <a:prstGeom prst="rect">
             <a:avLst/>
@@ -3347,32 +3181,32 @@
           <a:p>
             <a:pPr algn="l">
               <a:lnSpc>
-                <a:spcPts val="2682"/>
+                <a:spcPts val="1015"/>
               </a:lnSpc>
             </a:pPr>
             <a:r>
-              <a:rPr sz="1850" b="1" spc="50">
+              <a:rPr sz="700" b="1" spc="200">
                 <a:solidFill>
-                  <a:srgbClr val="FFFFFF"/>
+                  <a:srgbClr val="6C4357"/>
                 </a:solidFill>
                 <a:latin typeface="맑은 고딕"/>
                 <a:ea typeface="맑은 고딕"/>
               </a:rPr>
-              <a:t>소하영</a:t>
-            </a:r>
-          </a:p>
-        </p:txBody>
-      </p:sp>
-      <p:sp>
-        <p:nvSpPr>
-          <p:cNvPr id="13" name="텍스트"/>
+              <a:t>학교 · 학원 이름</a:t>
+            </a:r>
+          </a:p>
+        </p:txBody>
+      </p:sp>
+      <p:sp>
+        <p:nvSpPr>
+          <p:cNvPr id="5" name="텍스트"/>
           <p:cNvSpPr txBox="1"/>
           <p:nvPr/>
         </p:nvSpPr>
         <p:spPr>
           <a:xfrm>
-            <a:off x="230400" y="475200"/>
-            <a:ext cx="2160000" cy="122400"/>
+            <a:off x="1692000" y="540000"/>
+            <a:ext cx="1368000" cy="360000"/>
           </a:xfrm>
           <a:prstGeom prst="rect">
             <a:avLst/>
@@ -3387,32 +3221,32 @@
           <a:p>
             <a:pPr algn="l">
               <a:lnSpc>
-                <a:spcPts val="1232"/>
+                <a:spcPts val="3190"/>
               </a:lnSpc>
             </a:pPr>
             <a:r>
-              <a:rPr sz="850" b="1">
+              <a:rPr sz="2200" b="1">
                 <a:solidFill>
-                  <a:srgbClr val="FFFFFF"/>
+                  <a:srgbClr val="12151C"/>
                 </a:solidFill>
                 <a:latin typeface="맑은 고딕"/>
                 <a:ea typeface="맑은 고딕"/>
               </a:rPr>
-              <a:t>영어 강사</a:t>
-            </a:r>
-          </a:p>
-        </p:txBody>
-      </p:sp>
-      <p:sp>
-        <p:nvSpPr>
-          <p:cNvPr id="14" name="텍스트"/>
+              <a:t>소하영</a:t>
+            </a:r>
+          </a:p>
+        </p:txBody>
+      </p:sp>
+      <p:sp>
+        <p:nvSpPr>
+          <p:cNvPr id="6" name="텍스트"/>
           <p:cNvSpPr txBox="1"/>
           <p:nvPr/>
         </p:nvSpPr>
         <p:spPr>
           <a:xfrm>
-            <a:off x="230400" y="835200"/>
-            <a:ext cx="1800000" cy="100800"/>
+            <a:off x="1692000" y="943200"/>
+            <a:ext cx="1368000" cy="171451"/>
           </a:xfrm>
           <a:prstGeom prst="rect">
             <a:avLst/>
@@ -3427,32 +3261,61 @@
           <a:p>
             <a:pPr algn="l">
               <a:lnSpc>
-                <a:spcPts val="1087"/>
+                <a:spcPts val="1305"/>
               </a:lnSpc>
             </a:pPr>
             <a:r>
-              <a:rPr sz="750" b="1" spc="150">
+              <a:rPr sz="900" b="0">
                 <a:solidFill>
-                  <a:srgbClr val="67785E"/>
+                  <a:srgbClr val="6C4357"/>
                 </a:solidFill>
                 <a:latin typeface="맑은 고딕"/>
                 <a:ea typeface="맑은 고딕"/>
               </a:rPr>
-              <a:t>학교 · 학원 이름</a:t>
-            </a:r>
-          </a:p>
-        </p:txBody>
-      </p:sp>
-      <p:sp>
-        <p:nvSpPr>
-          <p:cNvPr id="15" name="텍스트"/>
+              <a:t>영어 강사</a:t>
+            </a:r>
+          </a:p>
+        </p:txBody>
+      </p:sp>
+      <p:sp>
+        <p:nvSpPr>
+          <p:cNvPr id="7" name="Rectangle 6"/>
+          <p:cNvSpPr/>
+          <p:nvPr/>
+        </p:nvSpPr>
+        <p:spPr>
+          <a:xfrm>
+            <a:off x="1692000" y="1195200"/>
+            <a:ext cx="144000" cy="18000"/>
+          </a:xfrm>
+          <a:prstGeom prst="rect">
+            <a:avLst/>
+          </a:prstGeom>
+          <a:solidFill>
+            <a:srgbClr val="FF8FB8"/>
+          </a:solidFill>
+          <a:ln>
+            <a:noFill/>
+          </a:ln>
+        </p:spPr>
+        <p:txBody>
+          <a:bodyPr rtlCol="0" anchor="ctr"/>
+          <a:lstStyle/>
+          <a:p>
+            <a:pPr algn="ctr"/>
+          </a:p>
+        </p:txBody>
+      </p:sp>
+      <p:sp>
+        <p:nvSpPr>
+          <p:cNvPr id="8" name="텍스트"/>
           <p:cNvSpPr txBox="1"/>
           <p:nvPr/>
         </p:nvSpPr>
         <p:spPr>
           <a:xfrm>
-            <a:off x="230400" y="1015200"/>
-            <a:ext cx="122400" cy="168911"/>
+            <a:off x="1692000" y="1328400"/>
+            <a:ext cx="331200" cy="99061"/>
           </a:xfrm>
           <a:prstGeom prst="rect">
             <a:avLst/>
@@ -3467,32 +3330,32 @@
           <a:p>
             <a:pPr algn="l">
               <a:lnSpc>
-                <a:spcPts val="1015"/>
+                <a:spcPts val="754"/>
               </a:lnSpc>
             </a:pPr>
             <a:r>
-              <a:rPr sz="700" b="1">
+              <a:rPr sz="520" b="1" spc="120">
                 <a:solidFill>
-                  <a:srgbClr val="4F8036"/>
+                  <a:srgbClr val="6C4357"/>
                 </a:solidFill>
                 <a:latin typeface="맑은 고딕"/>
                 <a:ea typeface="맑은 고딕"/>
               </a:rPr>
-              <a:t>T</a:t>
-            </a:r>
-          </a:p>
-        </p:txBody>
-      </p:sp>
-      <p:sp>
-        <p:nvSpPr>
-          <p:cNvPr id="16" name="텍스트"/>
+              <a:t>TEL</a:t>
+            </a:r>
+          </a:p>
+        </p:txBody>
+      </p:sp>
+      <p:sp>
+        <p:nvSpPr>
+          <p:cNvPr id="9" name="텍스트"/>
           <p:cNvSpPr txBox="1"/>
           <p:nvPr/>
         </p:nvSpPr>
         <p:spPr>
           <a:xfrm>
-            <a:off x="374400" y="1015200"/>
-            <a:ext cx="1872000" cy="168911"/>
+            <a:off x="2023200" y="1317600"/>
+            <a:ext cx="1188000" cy="125731"/>
           </a:xfrm>
           <a:prstGeom prst="rect">
             <a:avLst/>
@@ -3507,13 +3370,13 @@
           <a:p>
             <a:pPr algn="l">
               <a:lnSpc>
-                <a:spcPts val="1015"/>
+                <a:spcPts val="956"/>
               </a:lnSpc>
             </a:pPr>
             <a:r>
-              <a:rPr sz="700" b="0">
+              <a:rPr sz="660" b="0">
                 <a:solidFill>
-                  <a:srgbClr val="314F22"/>
+                  <a:srgbClr val="12151C"/>
                 </a:solidFill>
                 <a:latin typeface="맑은 고딕"/>
                 <a:ea typeface="맑은 고딕"/>
@@ -3525,14 +3388,14 @@
       </p:sp>
       <p:sp>
         <p:nvSpPr>
-          <p:cNvPr id="17" name="텍스트"/>
+          <p:cNvPr id="10" name="텍스트"/>
           <p:cNvSpPr txBox="1"/>
           <p:nvPr/>
         </p:nvSpPr>
         <p:spPr>
           <a:xfrm>
-            <a:off x="230400" y="1184111"/>
-            <a:ext cx="122400" cy="168911"/>
+            <a:off x="1692000" y="1458000"/>
+            <a:ext cx="331200" cy="99061"/>
           </a:xfrm>
           <a:prstGeom prst="rect">
             <a:avLst/>
@@ -3547,32 +3410,32 @@
           <a:p>
             <a:pPr algn="l">
               <a:lnSpc>
-                <a:spcPts val="1015"/>
+                <a:spcPts val="754"/>
               </a:lnSpc>
             </a:pPr>
             <a:r>
-              <a:rPr sz="700" b="1">
+              <a:rPr sz="520" b="1" spc="120">
                 <a:solidFill>
-                  <a:srgbClr val="4F8036"/>
+                  <a:srgbClr val="6C4357"/>
                 </a:solidFill>
                 <a:latin typeface="맑은 고딕"/>
                 <a:ea typeface="맑은 고딕"/>
               </a:rPr>
-              <a:t>E</a:t>
-            </a:r>
-          </a:p>
-        </p:txBody>
-      </p:sp>
-      <p:sp>
-        <p:nvSpPr>
-          <p:cNvPr id="18" name="텍스트"/>
+              <a:t>MAIL</a:t>
+            </a:r>
+          </a:p>
+        </p:txBody>
+      </p:sp>
+      <p:sp>
+        <p:nvSpPr>
+          <p:cNvPr id="11" name="텍스트"/>
           <p:cNvSpPr txBox="1"/>
           <p:nvPr/>
         </p:nvSpPr>
         <p:spPr>
           <a:xfrm>
-            <a:off x="374400" y="1184111"/>
-            <a:ext cx="1872000" cy="168911"/>
+            <a:off x="2023200" y="1447200"/>
+            <a:ext cx="1188000" cy="125731"/>
           </a:xfrm>
           <a:prstGeom prst="rect">
             <a:avLst/>
@@ -3587,13 +3450,13 @@
           <a:p>
             <a:pPr algn="l">
               <a:lnSpc>
-                <a:spcPts val="1015"/>
+                <a:spcPts val="956"/>
               </a:lnSpc>
             </a:pPr>
             <a:r>
-              <a:rPr sz="700" b="0">
+              <a:rPr sz="660" b="0">
                 <a:solidFill>
-                  <a:srgbClr val="314F22"/>
+                  <a:srgbClr val="12151C"/>
                 </a:solidFill>
                 <a:latin typeface="맑은 고딕"/>
                 <a:ea typeface="맑은 고딕"/>
@@ -3605,14 +3468,14 @@
       </p:sp>
       <p:sp>
         <p:nvSpPr>
-          <p:cNvPr id="19" name="텍스트"/>
+          <p:cNvPr id="12" name="텍스트"/>
           <p:cNvSpPr txBox="1"/>
           <p:nvPr/>
         </p:nvSpPr>
         <p:spPr>
           <a:xfrm>
-            <a:off x="230400" y="1353022"/>
-            <a:ext cx="122400" cy="168911"/>
+            <a:off x="1692000" y="1587600"/>
+            <a:ext cx="331200" cy="99061"/>
           </a:xfrm>
           <a:prstGeom prst="rect">
             <a:avLst/>
@@ -3627,32 +3490,32 @@
           <a:p>
             <a:pPr algn="l">
               <a:lnSpc>
-                <a:spcPts val="1015"/>
+                <a:spcPts val="754"/>
               </a:lnSpc>
             </a:pPr>
             <a:r>
-              <a:rPr sz="700" b="1">
+              <a:rPr sz="520" b="1" spc="120">
                 <a:solidFill>
-                  <a:srgbClr val="4F8036"/>
+                  <a:srgbClr val="6C4357"/>
                 </a:solidFill>
                 <a:latin typeface="맑은 고딕"/>
                 <a:ea typeface="맑은 고딕"/>
               </a:rPr>
-              <a:t>A</a:t>
-            </a:r>
-          </a:p>
-        </p:txBody>
-      </p:sp>
-      <p:sp>
-        <p:nvSpPr>
-          <p:cNvPr id="20" name="텍스트"/>
+              <a:t>ADDR</a:t>
+            </a:r>
+          </a:p>
+        </p:txBody>
+      </p:sp>
+      <p:sp>
+        <p:nvSpPr>
+          <p:cNvPr id="13" name="텍스트"/>
           <p:cNvSpPr txBox="1"/>
           <p:nvPr/>
         </p:nvSpPr>
         <p:spPr>
           <a:xfrm>
-            <a:off x="374400" y="1353022"/>
-            <a:ext cx="1872000" cy="168911"/>
+            <a:off x="2023200" y="1576800"/>
+            <a:ext cx="1188000" cy="125731"/>
           </a:xfrm>
           <a:prstGeom prst="rect">
             <a:avLst/>
@@ -3667,13 +3530,13 @@
           <a:p>
             <a:pPr algn="l">
               <a:lnSpc>
-                <a:spcPts val="1015"/>
+                <a:spcPts val="956"/>
               </a:lnSpc>
             </a:pPr>
             <a:r>
-              <a:rPr sz="700" b="0">
+              <a:rPr sz="660" b="0">
                 <a:solidFill>
-                  <a:srgbClr val="314F22"/>
+                  <a:srgbClr val="12151C"/>
                 </a:solidFill>
                 <a:latin typeface="맑은 고딕"/>
                 <a:ea typeface="맑은 고딕"/>
@@ -3697,7 +3560,7 @@
     <p:bg>
       <p:bgPr>
         <a:solidFill>
-          <a:srgbClr val="314F22"/>
+          <a:srgbClr val="0E1116"/>
         </a:solidFill>
         <a:effectLst/>
       </p:bgPr>
@@ -3718,13 +3581,13 @@
         <p:spPr>
           <a:xfrm>
             <a:off x="0" y="0"/>
-            <a:ext cx="64800" cy="1800000"/>
+            <a:ext cx="3240000" cy="1800000"/>
           </a:xfrm>
           <a:prstGeom prst="rect">
             <a:avLst/>
           </a:prstGeom>
           <a:solidFill>
-            <a:srgbClr val="8AB375"/>
+            <a:srgbClr val="FF8FB8"/>
           </a:solidFill>
           <a:ln>
             <a:noFill/>
@@ -3740,14 +3603,130 @@
       </p:sp>
       <p:sp>
         <p:nvSpPr>
-          <p:cNvPr id="3" name="텍스트"/>
+          <p:cNvPr id="3" name="Freeform 2"/>
+          <p:cNvSpPr/>
+          <p:nvPr/>
+        </p:nvSpPr>
+        <p:spPr>
+          <a:xfrm>
+            <a:off x="2412000" y="972000"/>
+            <a:ext cx="828000" cy="828000"/>
+          </a:xfrm>
+          <a:custGeom>
+            <a:avLst/>
+            <a:gdLst/>
+            <a:ahLst/>
+            <a:cxnLst/>
+            <a:rect l="l" t="t" r="r" b="b"/>
+            <a:pathLst>
+              <a:path w="828000" h="828000">
+                <a:moveTo>
+                  <a:pt x="828000" y="828000"/>
+                </a:moveTo>
+                <a:lnTo>
+                  <a:pt x="0" y="828000"/>
+                </a:lnTo>
+                <a:lnTo>
+                  <a:pt x="1773" y="773846"/>
+                </a:lnTo>
+                <a:lnTo>
+                  <a:pt x="7084" y="719924"/>
+                </a:lnTo>
+                <a:lnTo>
+                  <a:pt x="15910" y="666465"/>
+                </a:lnTo>
+                <a:lnTo>
+                  <a:pt x="28213" y="613698"/>
+                </a:lnTo>
+                <a:lnTo>
+                  <a:pt x="43942" y="561848"/>
+                </a:lnTo>
+                <a:lnTo>
+                  <a:pt x="63028" y="511138"/>
+                </a:lnTo>
+                <a:lnTo>
+                  <a:pt x="85389" y="461785"/>
+                </a:lnTo>
+                <a:lnTo>
+                  <a:pt x="110931" y="414000"/>
+                </a:lnTo>
+                <a:lnTo>
+                  <a:pt x="139543" y="367988"/>
+                </a:lnTo>
+                <a:lnTo>
+                  <a:pt x="171103" y="323946"/>
+                </a:lnTo>
+                <a:lnTo>
+                  <a:pt x="205477" y="282062"/>
+                </a:lnTo>
+                <a:lnTo>
+                  <a:pt x="242516" y="242516"/>
+                </a:lnTo>
+                <a:lnTo>
+                  <a:pt x="282062" y="205477"/>
+                </a:lnTo>
+                <a:lnTo>
+                  <a:pt x="323946" y="171103"/>
+                </a:lnTo>
+                <a:lnTo>
+                  <a:pt x="367988" y="139543"/>
+                </a:lnTo>
+                <a:lnTo>
+                  <a:pt x="414000" y="110931"/>
+                </a:lnTo>
+                <a:lnTo>
+                  <a:pt x="461785" y="85389"/>
+                </a:lnTo>
+                <a:lnTo>
+                  <a:pt x="511138" y="63028"/>
+                </a:lnTo>
+                <a:lnTo>
+                  <a:pt x="561848" y="43942"/>
+                </a:lnTo>
+                <a:lnTo>
+                  <a:pt x="613698" y="28213"/>
+                </a:lnTo>
+                <a:lnTo>
+                  <a:pt x="666465" y="15910"/>
+                </a:lnTo>
+                <a:lnTo>
+                  <a:pt x="719924" y="7084"/>
+                </a:lnTo>
+                <a:lnTo>
+                  <a:pt x="773846" y="1773"/>
+                </a:lnTo>
+                <a:lnTo>
+                  <a:pt x="828000" y="0"/>
+                </a:lnTo>
+                <a:close/>
+              </a:path>
+            </a:pathLst>
+          </a:custGeom>
+          <a:solidFill>
+            <a:srgbClr val="FFA8C8"/>
+          </a:solidFill>
+          <a:ln>
+            <a:noFill/>
+          </a:ln>
+        </p:spPr>
+        <p:txBody>
+          <a:bodyPr rtlCol="0" anchor="ctr"/>
+          <a:lstStyle/>
+          <a:p>
+            <a:pPr algn="ctr"/>
+          </a:p>
+        </p:txBody>
+      </p:sp>
+      <p:sp>
+        <p:nvSpPr>
+          <p:cNvPr id="4" name="텍스트"/>
           <p:cNvSpPr txBox="1"/>
           <p:nvPr/>
         </p:nvSpPr>
         <p:spPr>
           <a:xfrm>
             <a:off x="252000" y="432000"/>
-            <a:ext cx="2016000" cy="252000"/>
+            <a:ext cx="2304000" cy="720000"/>
           </a:xfrm>
           <a:prstGeom prst="rect">
             <a:avLst/>
@@ -3762,32 +3741,49 @@
           <a:p>
             <a:pPr algn="l">
               <a:lnSpc>
-                <a:spcPts val="2465"/>
+                <a:spcPts val="1884"/>
               </a:lnSpc>
             </a:pPr>
             <a:r>
-              <a:rPr sz="1700" b="1">
+              <a:rPr sz="1300" b="1">
                 <a:solidFill>
-                  <a:srgbClr val="FFFFFF"/>
+                  <a:srgbClr val="12151C"/>
                 </a:solidFill>
                 <a:latin typeface="맑은 고딕"/>
                 <a:ea typeface="맑은 고딕"/>
               </a:rPr>
-              <a:t>학교 · 학원 이름</a:t>
-            </a:r>
-          </a:p>
-        </p:txBody>
-      </p:sp>
-      <p:sp>
-        <p:nvSpPr>
-          <p:cNvPr id="4" name="텍스트"/>
+              <a:t>눈높이를 맞추는</a:t>
+            </a:r>
+          </a:p>
+          <a:p>
+            <a:pPr algn="l">
+              <a:lnSpc>
+                <a:spcPts val="1884"/>
+              </a:lnSpc>
+            </a:pPr>
+            <a:r>
+              <a:rPr sz="1300" b="1">
+                <a:solidFill>
+                  <a:srgbClr val="12151C"/>
+                </a:solidFill>
+                <a:latin typeface="맑은 고딕"/>
+                <a:ea typeface="맑은 고딕"/>
+              </a:rPr>
+              <a:t>일이 시작입니다</a:t>
+            </a:r>
+          </a:p>
+        </p:txBody>
+      </p:sp>
+      <p:sp>
+        <p:nvSpPr>
+          <p:cNvPr id="5" name="텍스트"/>
           <p:cNvSpPr txBox="1"/>
           <p:nvPr/>
         </p:nvSpPr>
         <p:spPr>
           <a:xfrm>
-            <a:off x="252000" y="878400"/>
-            <a:ext cx="2016000" cy="540000"/>
+            <a:off x="252000" y="1476000"/>
+            <a:ext cx="1800000" cy="133351"/>
           </a:xfrm>
           <a:prstGeom prst="rect">
             <a:avLst/>
@@ -3802,318 +3798,22 @@
           <a:p>
             <a:pPr algn="l">
               <a:lnSpc>
-                <a:spcPts val="1232"/>
+                <a:spcPts val="1015"/>
               </a:lnSpc>
             </a:pPr>
             <a:r>
-              <a:rPr sz="850" b="0">
+              <a:rPr sz="700" b="1" spc="200">
                 <a:solidFill>
-                  <a:srgbClr val="B7C1B2"/>
+                  <a:srgbClr val="12151C"/>
                 </a:solidFill>
                 <a:latin typeface="맑은 고딕"/>
                 <a:ea typeface="맑은 고딕"/>
               </a:rPr>
-              <a:t>눈높이를 맞추는 일이 시작입니다</a:t>
-            </a:r>
-          </a:p>
-        </p:txBody>
-      </p:sp>
-      <p:sp>
-        <p:nvSpPr>
-          <p:cNvPr id="5" name="Rectangle 4"/>
-          <p:cNvSpPr/>
-          <p:nvPr/>
-        </p:nvSpPr>
-        <p:spPr>
-          <a:xfrm>
-            <a:off x="2520000" y="1080000"/>
-            <a:ext cx="504000" cy="504000"/>
-          </a:xfrm>
-          <a:prstGeom prst="rect">
-            <a:avLst/>
-          </a:prstGeom>
-          <a:noFill/>
-          <a:ln w="9000">
-            <a:solidFill>
-              <a:srgbClr val="8AB375"/>
-            </a:solidFill>
-            <a:prstDash val="dash"/>
-          </a:ln>
-        </p:spPr>
-        <p:txBody>
-          <a:bodyPr rtlCol="0" anchor="ctr"/>
-          <a:lstStyle/>
-          <a:p>
-            <a:pPr algn="ctr"/>
-          </a:p>
-        </p:txBody>
-      </p:sp>
-      <p:sp>
-        <p:nvSpPr>
-          <p:cNvPr id="6" name="텍스트"/>
-          <p:cNvSpPr txBox="1"/>
-          <p:nvPr/>
-        </p:nvSpPr>
-        <p:spPr>
-          <a:xfrm>
-            <a:off x="2520000" y="1080000"/>
-            <a:ext cx="504000" cy="504000"/>
-          </a:xfrm>
-          <a:prstGeom prst="rect">
-            <a:avLst/>
-          </a:prstGeom>
-          <a:noFill/>
-        </p:spPr>
-        <p:txBody>
-          <a:bodyPr wrap="square" lIns="0" rIns="0" tIns="0" bIns="0" anchor="ctr">
-            <a:spAutoFit/>
-          </a:bodyPr>
-          <a:lstStyle/>
-          <a:p>
-            <a:pPr algn="ctr">
-              <a:lnSpc>
-                <a:spcPts val="1305"/>
-              </a:lnSpc>
-            </a:pPr>
-            <a:r>
-              <a:rPr sz="900" b="1">
-                <a:solidFill>
-                  <a:srgbClr val="B7C1B2"/>
-                </a:solidFill>
-                <a:latin typeface="맑은 고딕"/>
-                <a:ea typeface="맑은 고딕"/>
-              </a:rPr>
-              <a:t>QR</a:t>
-            </a:r>
-          </a:p>
-        </p:txBody>
-      </p:sp>
-      <p:sp>
-        <p:nvSpPr>
-          <p:cNvPr id="7" name="Rectangle 6"/>
-          <p:cNvSpPr/>
-          <p:nvPr/>
-        </p:nvSpPr>
-        <p:spPr>
-          <a:xfrm>
-            <a:off x="252000" y="763200"/>
-            <a:ext cx="201600" cy="14400"/>
-          </a:xfrm>
-          <a:prstGeom prst="rect">
-            <a:avLst/>
-          </a:prstGeom>
-          <a:solidFill>
-            <a:srgbClr val="8AB375"/>
-          </a:solidFill>
-          <a:ln>
-            <a:noFill/>
-          </a:ln>
-        </p:spPr>
-        <p:txBody>
-          <a:bodyPr rtlCol="0" anchor="ctr"/>
-          <a:lstStyle/>
-          <a:p>
-            <a:pPr algn="ctr"/>
-          </a:p>
-        </p:txBody>
-      </p:sp>
-      <p:sp>
-        <p:nvSpPr>
-          <p:cNvPr id="8" name="Oval 7"/>
-          <p:cNvSpPr/>
-          <p:nvPr/>
-        </p:nvSpPr>
-        <p:spPr>
-          <a:xfrm>
-            <a:off x="2700720" y="360720"/>
-            <a:ext cx="142560" cy="142560"/>
-          </a:xfrm>
-          <a:prstGeom prst="ellipse">
-            <a:avLst/>
-          </a:prstGeom>
-          <a:solidFill>
-            <a:srgbClr val="8AB375"/>
-          </a:solidFill>
-          <a:ln>
-            <a:noFill/>
-          </a:ln>
-        </p:spPr>
-        <p:txBody>
-          <a:bodyPr rtlCol="0" anchor="ctr"/>
-          <a:lstStyle/>
-          <a:p>
-            <a:pPr algn="ctr"/>
-          </a:p>
-        </p:txBody>
-      </p:sp>
-      <p:cxnSp>
-        <p:nvCxnSpPr>
-          <p:cNvPr id="9" name="Connector 8"/>
-          <p:cNvCxnSpPr/>
-          <p:nvPr/>
-        </p:nvCxnSpPr>
-        <p:spPr>
-          <a:xfrm>
-            <a:off x="2875680" y="432000"/>
-            <a:ext cx="45360" cy="0"/>
-          </a:xfrm>
-          <a:prstGeom prst="line">
-            <a:avLst/>
-          </a:prstGeom>
-          <a:ln w="19440">
-            <a:solidFill>
-              <a:srgbClr val="526B45"/>
-            </a:solidFill>
-          </a:ln>
-        </p:spPr>
-      </p:cxnSp>
-      <p:cxnSp>
-        <p:nvCxnSpPr>
-          <p:cNvPr id="10" name="Connector 9"/>
-          <p:cNvCxnSpPr/>
-          <p:nvPr/>
-        </p:nvCxnSpPr>
-        <p:spPr>
-          <a:xfrm>
-            <a:off x="2845313" y="505313"/>
-            <a:ext cx="32074" cy="32074"/>
-          </a:xfrm>
-          <a:prstGeom prst="line">
-            <a:avLst/>
-          </a:prstGeom>
-          <a:ln w="19440">
-            <a:solidFill>
-              <a:srgbClr val="526B45"/>
-            </a:solidFill>
-          </a:ln>
-        </p:spPr>
-      </p:cxnSp>
-      <p:cxnSp>
-        <p:nvCxnSpPr>
-          <p:cNvPr id="11" name="Connector 10"/>
-          <p:cNvCxnSpPr/>
-          <p:nvPr/>
-        </p:nvCxnSpPr>
-        <p:spPr>
-          <a:xfrm>
-            <a:off x="2772000" y="535680"/>
-            <a:ext cx="0" cy="45360"/>
-          </a:xfrm>
-          <a:prstGeom prst="line">
-            <a:avLst/>
-          </a:prstGeom>
-          <a:ln w="19440">
-            <a:solidFill>
-              <a:srgbClr val="526B45"/>
-            </a:solidFill>
-          </a:ln>
-        </p:spPr>
-      </p:cxnSp>
-      <p:cxnSp>
-        <p:nvCxnSpPr>
-          <p:cNvPr id="12" name="Connector 11"/>
-          <p:cNvCxnSpPr/>
-          <p:nvPr/>
-        </p:nvCxnSpPr>
-        <p:spPr>
-          <a:xfrm flipH="1">
-            <a:off x="2666613" y="505313"/>
-            <a:ext cx="32074" cy="32074"/>
-          </a:xfrm>
-          <a:prstGeom prst="line">
-            <a:avLst/>
-          </a:prstGeom>
-          <a:ln w="19440">
-            <a:solidFill>
-              <a:srgbClr val="526B45"/>
-            </a:solidFill>
-          </a:ln>
-        </p:spPr>
-      </p:cxnSp>
-      <p:cxnSp>
-        <p:nvCxnSpPr>
-          <p:cNvPr id="13" name="Connector 12"/>
-          <p:cNvCxnSpPr/>
-          <p:nvPr/>
-        </p:nvCxnSpPr>
-        <p:spPr>
-          <a:xfrm flipH="1">
-            <a:off x="2622960" y="432000"/>
-            <a:ext cx="45360" cy="0"/>
-          </a:xfrm>
-          <a:prstGeom prst="line">
-            <a:avLst/>
-          </a:prstGeom>
-          <a:ln w="19440">
-            <a:solidFill>
-              <a:srgbClr val="526B45"/>
-            </a:solidFill>
-          </a:ln>
-        </p:spPr>
-      </p:cxnSp>
-      <p:cxnSp>
-        <p:nvCxnSpPr>
-          <p:cNvPr id="14" name="Connector 13"/>
-          <p:cNvCxnSpPr/>
-          <p:nvPr/>
-        </p:nvCxnSpPr>
-        <p:spPr>
-          <a:xfrm flipH="1" flipV="1">
-            <a:off x="2666613" y="326613"/>
-            <a:ext cx="32074" cy="32074"/>
-          </a:xfrm>
-          <a:prstGeom prst="line">
-            <a:avLst/>
-          </a:prstGeom>
-          <a:ln w="19440">
-            <a:solidFill>
-              <a:srgbClr val="526B45"/>
-            </a:solidFill>
-          </a:ln>
-        </p:spPr>
-      </p:cxnSp>
-      <p:cxnSp>
-        <p:nvCxnSpPr>
-          <p:cNvPr id="15" name="Connector 14"/>
-          <p:cNvCxnSpPr/>
-          <p:nvPr/>
-        </p:nvCxnSpPr>
-        <p:spPr>
-          <a:xfrm flipV="1">
-            <a:off x="2772000" y="282960"/>
-            <a:ext cx="0" cy="45360"/>
-          </a:xfrm>
-          <a:prstGeom prst="line">
-            <a:avLst/>
-          </a:prstGeom>
-          <a:ln w="19440">
-            <a:solidFill>
-              <a:srgbClr val="526B45"/>
-            </a:solidFill>
-          </a:ln>
-        </p:spPr>
-      </p:cxnSp>
-      <p:cxnSp>
-        <p:nvCxnSpPr>
-          <p:cNvPr id="16" name="Connector 15"/>
-          <p:cNvCxnSpPr/>
-          <p:nvPr/>
-        </p:nvCxnSpPr>
-        <p:spPr>
-          <a:xfrm flipV="1">
-            <a:off x="2845313" y="326613"/>
-            <a:ext cx="32074" cy="32074"/>
-          </a:xfrm>
-          <a:prstGeom prst="line">
-            <a:avLst/>
-          </a:prstGeom>
-          <a:ln w="19440">
-            <a:solidFill>
-              <a:srgbClr val="526B45"/>
-            </a:solidFill>
-          </a:ln>
-        </p:spPr>
-      </p:cxnSp>
+              <a:t>학교 · 학원 이름</a:t>
+            </a:r>
+          </a:p>
+        </p:txBody>
+      </p:sp>
     </p:spTree>
   </p:cSld>
   <p:clrMapOvr>

--- a/public/fun/cards/teacher/teacher-43.pptx
+++ b/public/fun/cards/teacher/teacher-43.pptx
@@ -3097,196 +3097,37 @@
         <p:nvPr/>
       </p:nvGrpSpPr>
       <p:grpSpPr/>
-      <p:sp>
-        <p:nvSpPr>
-          <p:cNvPr id="2" name="Oval 1"/>
+      <p:cxnSp>
+        <p:nvCxnSpPr>
+          <p:cNvPr id="2" name="Connector 1"/>
+          <p:cNvCxnSpPr/>
+          <p:nvPr/>
+        </p:nvCxnSpPr>
+        <p:spPr>
+          <a:xfrm>
+            <a:off x="1080000" y="252000"/>
+            <a:ext cx="0" cy="1296000"/>
+          </a:xfrm>
+          <a:prstGeom prst="line">
+            <a:avLst/>
+          </a:prstGeom>
+          <a:ln w="3600">
+            <a:solidFill>
+              <a:srgbClr val="FFE0EB"/>
+            </a:solidFill>
+          </a:ln>
+        </p:spPr>
+      </p:cxnSp>
+      <p:sp>
+        <p:nvSpPr>
+          <p:cNvPr id="3" name="Rectangle 2"/>
           <p:cNvSpPr/>
           <p:nvPr/>
         </p:nvSpPr>
         <p:spPr>
           <a:xfrm>
-            <a:off x="547200" y="475200"/>
-            <a:ext cx="849600" cy="849600"/>
-          </a:xfrm>
-          <a:prstGeom prst="ellipse">
-            <a:avLst/>
-          </a:prstGeom>
-          <a:solidFill>
-            <a:srgbClr val="FFE6EF"/>
-          </a:solidFill>
-          <a:ln>
-            <a:noFill/>
-          </a:ln>
-        </p:spPr>
-        <p:txBody>
-          <a:bodyPr rtlCol="0" anchor="ctr"/>
-          <a:lstStyle/>
-          <a:p>
-            <a:pPr algn="ctr"/>
-          </a:p>
-        </p:txBody>
-      </p:sp>
-      <p:sp>
-        <p:nvSpPr>
-          <p:cNvPr id="3" name="Oval 2"/>
-          <p:cNvSpPr/>
-          <p:nvPr/>
-        </p:nvSpPr>
-        <p:spPr>
-          <a:xfrm>
-            <a:off x="187200" y="475200"/>
-            <a:ext cx="849600" cy="849600"/>
-          </a:xfrm>
-          <a:prstGeom prst="ellipse">
-            <a:avLst/>
-          </a:prstGeom>
-          <a:solidFill>
-            <a:srgbClr val="FF8FB8">
-              <a:alpha val="92000"/>
-            </a:srgbClr>
-          </a:solidFill>
-          <a:ln>
-            <a:noFill/>
-          </a:ln>
-        </p:spPr>
-        <p:txBody>
-          <a:bodyPr rtlCol="0" anchor="ctr"/>
-          <a:lstStyle/>
-          <a:p>
-            <a:pPr algn="ctr"/>
-          </a:p>
-        </p:txBody>
-      </p:sp>
-      <p:sp>
-        <p:nvSpPr>
-          <p:cNvPr id="4" name="텍스트"/>
-          <p:cNvSpPr txBox="1"/>
-          <p:nvPr/>
-        </p:nvSpPr>
-        <p:spPr>
-          <a:xfrm>
-            <a:off x="1692000" y="223200"/>
-            <a:ext cx="1296000" cy="133351"/>
-          </a:xfrm>
-          <a:prstGeom prst="rect">
-            <a:avLst/>
-          </a:prstGeom>
-          <a:noFill/>
-        </p:spPr>
-        <p:txBody>
-          <a:bodyPr wrap="square" lIns="0" rIns="0" tIns="0" bIns="0" anchor="t">
-            <a:spAutoFit/>
-          </a:bodyPr>
-          <a:lstStyle/>
-          <a:p>
-            <a:pPr algn="l">
-              <a:lnSpc>
-                <a:spcPts val="1015"/>
-              </a:lnSpc>
-            </a:pPr>
-            <a:r>
-              <a:rPr sz="700" b="1" spc="200">
-                <a:solidFill>
-                  <a:srgbClr val="6C4357"/>
-                </a:solidFill>
-                <a:latin typeface="맑은 고딕"/>
-                <a:ea typeface="맑은 고딕"/>
-              </a:rPr>
-              <a:t>학교 · 학원 이름</a:t>
-            </a:r>
-          </a:p>
-        </p:txBody>
-      </p:sp>
-      <p:sp>
-        <p:nvSpPr>
-          <p:cNvPr id="5" name="텍스트"/>
-          <p:cNvSpPr txBox="1"/>
-          <p:nvPr/>
-        </p:nvSpPr>
-        <p:spPr>
-          <a:xfrm>
-            <a:off x="1692000" y="540000"/>
-            <a:ext cx="1368000" cy="360000"/>
-          </a:xfrm>
-          <a:prstGeom prst="rect">
-            <a:avLst/>
-          </a:prstGeom>
-          <a:noFill/>
-        </p:spPr>
-        <p:txBody>
-          <a:bodyPr wrap="square" lIns="0" rIns="0" tIns="0" bIns="0" anchor="t">
-            <a:spAutoFit/>
-          </a:bodyPr>
-          <a:lstStyle/>
-          <a:p>
-            <a:pPr algn="l">
-              <a:lnSpc>
-                <a:spcPts val="3190"/>
-              </a:lnSpc>
-            </a:pPr>
-            <a:r>
-              <a:rPr sz="2200" b="1">
-                <a:solidFill>
-                  <a:srgbClr val="12151C"/>
-                </a:solidFill>
-                <a:latin typeface="맑은 고딕"/>
-                <a:ea typeface="맑은 고딕"/>
-              </a:rPr>
-              <a:t>소하영</a:t>
-            </a:r>
-          </a:p>
-        </p:txBody>
-      </p:sp>
-      <p:sp>
-        <p:nvSpPr>
-          <p:cNvPr id="6" name="텍스트"/>
-          <p:cNvSpPr txBox="1"/>
-          <p:nvPr/>
-        </p:nvSpPr>
-        <p:spPr>
-          <a:xfrm>
-            <a:off x="1692000" y="943200"/>
-            <a:ext cx="1368000" cy="171451"/>
-          </a:xfrm>
-          <a:prstGeom prst="rect">
-            <a:avLst/>
-          </a:prstGeom>
-          <a:noFill/>
-        </p:spPr>
-        <p:txBody>
-          <a:bodyPr wrap="square" lIns="0" rIns="0" tIns="0" bIns="0" anchor="t">
-            <a:spAutoFit/>
-          </a:bodyPr>
-          <a:lstStyle/>
-          <a:p>
-            <a:pPr algn="l">
-              <a:lnSpc>
-                <a:spcPts val="1305"/>
-              </a:lnSpc>
-            </a:pPr>
-            <a:r>
-              <a:rPr sz="900" b="0">
-                <a:solidFill>
-                  <a:srgbClr val="6C4357"/>
-                </a:solidFill>
-                <a:latin typeface="맑은 고딕"/>
-                <a:ea typeface="맑은 고딕"/>
-              </a:rPr>
-              <a:t>영어 강사</a:t>
-            </a:r>
-          </a:p>
-        </p:txBody>
-      </p:sp>
-      <p:sp>
-        <p:nvSpPr>
-          <p:cNvPr id="7" name="Rectangle 6"/>
-          <p:cNvSpPr/>
-          <p:nvPr/>
-        </p:nvSpPr>
-        <p:spPr>
-          <a:xfrm>
-            <a:off x="1692000" y="1195200"/>
-            <a:ext cx="144000" cy="18000"/>
+            <a:off x="1069200" y="252000"/>
+            <a:ext cx="21600" cy="201600"/>
           </a:xfrm>
           <a:prstGeom prst="rect">
             <a:avLst/>
@@ -3308,14 +3149,14 @@
       </p:sp>
       <p:sp>
         <p:nvSpPr>
-          <p:cNvPr id="8" name="텍스트"/>
+          <p:cNvPr id="4" name="텍스트"/>
           <p:cNvSpPr txBox="1"/>
           <p:nvPr/>
         </p:nvSpPr>
         <p:spPr>
           <a:xfrm>
-            <a:off x="1692000" y="1328400"/>
-            <a:ext cx="331200" cy="99061"/>
+            <a:off x="252000" y="252000"/>
+            <a:ext cx="756000" cy="123826"/>
           </a:xfrm>
           <a:prstGeom prst="rect">
             <a:avLst/>
@@ -3330,11 +3171,221 @@
           <a:p>
             <a:pPr algn="l">
               <a:lnSpc>
-                <a:spcPts val="754"/>
+                <a:spcPts val="942"/>
               </a:lnSpc>
             </a:pPr>
             <a:r>
-              <a:rPr sz="520" b="1" spc="120">
+              <a:rPr sz="650" b="1" spc="220">
+                <a:solidFill>
+                  <a:srgbClr val="6C4357"/>
+                </a:solidFill>
+                <a:latin typeface="맑은 고딕"/>
+                <a:ea typeface="맑은 고딕"/>
+              </a:rPr>
+              <a:t>학교 · 학원 이름</a:t>
+            </a:r>
+          </a:p>
+        </p:txBody>
+      </p:sp>
+      <p:sp>
+        <p:nvSpPr>
+          <p:cNvPr id="5" name="Oval 4"/>
+          <p:cNvSpPr/>
+          <p:nvPr/>
+        </p:nvSpPr>
+        <p:spPr>
+          <a:xfrm>
+            <a:off x="273600" y="734400"/>
+            <a:ext cx="244800" cy="244800"/>
+          </a:xfrm>
+          <a:prstGeom prst="ellipse">
+            <a:avLst/>
+          </a:prstGeom>
+          <a:noFill/>
+          <a:ln w="5040">
+            <a:solidFill>
+              <a:srgbClr val="FF8FB8"/>
+            </a:solidFill>
+          </a:ln>
+        </p:spPr>
+        <p:txBody>
+          <a:bodyPr rtlCol="0" anchor="ctr"/>
+          <a:lstStyle/>
+          <a:p>
+            <a:pPr algn="ctr"/>
+          </a:p>
+        </p:txBody>
+      </p:sp>
+      <p:sp>
+        <p:nvSpPr>
+          <p:cNvPr id="6" name="텍스트"/>
+          <p:cNvSpPr txBox="1"/>
+          <p:nvPr/>
+        </p:nvSpPr>
+        <p:spPr>
+          <a:xfrm>
+            <a:off x="252000" y="734400"/>
+            <a:ext cx="288000" cy="252000"/>
+          </a:xfrm>
+          <a:prstGeom prst="rect">
+            <a:avLst/>
+          </a:prstGeom>
+          <a:noFill/>
+        </p:spPr>
+        <p:txBody>
+          <a:bodyPr wrap="square" lIns="0" rIns="0" tIns="0" bIns="0" anchor="ctr">
+            <a:spAutoFit/>
+          </a:bodyPr>
+          <a:lstStyle/>
+          <a:p>
+            <a:pPr algn="ctr">
+              <a:lnSpc>
+                <a:spcPts val="1305"/>
+              </a:lnSpc>
+            </a:pPr>
+            <a:r>
+              <a:rPr sz="900" b="1">
+                <a:solidFill>
+                  <a:srgbClr val="FF8FB8"/>
+                </a:solidFill>
+                <a:latin typeface="맑은 고딕"/>
+                <a:ea typeface="맑은 고딕"/>
+              </a:rPr>
+              <a:t>학</a:t>
+            </a:r>
+          </a:p>
+        </p:txBody>
+      </p:sp>
+      <p:sp>
+        <p:nvSpPr>
+          <p:cNvPr id="7" name="텍스트"/>
+          <p:cNvSpPr txBox="1"/>
+          <p:nvPr/>
+        </p:nvSpPr>
+        <p:spPr>
+          <a:xfrm>
+            <a:off x="1260000" y="432000"/>
+            <a:ext cx="1800000" cy="237600"/>
+          </a:xfrm>
+          <a:prstGeom prst="rect">
+            <a:avLst/>
+          </a:prstGeom>
+          <a:noFill/>
+        </p:spPr>
+        <p:txBody>
+          <a:bodyPr wrap="square" lIns="0" rIns="0" tIns="0" bIns="0" anchor="t">
+            <a:spAutoFit/>
+          </a:bodyPr>
+          <a:lstStyle/>
+          <a:p>
+            <a:pPr algn="l">
+              <a:lnSpc>
+                <a:spcPts val="1957"/>
+              </a:lnSpc>
+            </a:pPr>
+            <a:r>
+              <a:rPr sz="1350" b="1" spc="120">
+                <a:solidFill>
+                  <a:srgbClr val="12151C"/>
+                </a:solidFill>
+                <a:latin typeface="맑은 고딕"/>
+                <a:ea typeface="맑은 고딕"/>
+              </a:rPr>
+              <a:t>소하영</a:t>
+            </a:r>
+          </a:p>
+        </p:txBody>
+      </p:sp>
+      <p:sp>
+        <p:nvSpPr>
+          <p:cNvPr id="8" name="텍스트"/>
+          <p:cNvSpPr txBox="1"/>
+          <p:nvPr/>
+        </p:nvSpPr>
+        <p:spPr>
+          <a:xfrm>
+            <a:off x="1260000" y="684000"/>
+            <a:ext cx="1800000" cy="133351"/>
+          </a:xfrm>
+          <a:prstGeom prst="rect">
+            <a:avLst/>
+          </a:prstGeom>
+          <a:noFill/>
+        </p:spPr>
+        <p:txBody>
+          <a:bodyPr wrap="square" lIns="0" rIns="0" tIns="0" bIns="0" anchor="t">
+            <a:spAutoFit/>
+          </a:bodyPr>
+          <a:lstStyle/>
+          <a:p>
+            <a:pPr algn="l">
+              <a:lnSpc>
+                <a:spcPts val="1015"/>
+              </a:lnSpc>
+            </a:pPr>
+            <a:r>
+              <a:rPr sz="700" b="0" spc="60">
+                <a:solidFill>
+                  <a:srgbClr val="6C4357"/>
+                </a:solidFill>
+                <a:latin typeface="맑은 고딕"/>
+                <a:ea typeface="맑은 고딕"/>
+              </a:rPr>
+              <a:t>영어 강사</a:t>
+            </a:r>
+          </a:p>
+        </p:txBody>
+      </p:sp>
+      <p:cxnSp>
+        <p:nvCxnSpPr>
+          <p:cNvPr id="9" name="Connector 8"/>
+          <p:cNvCxnSpPr/>
+          <p:nvPr/>
+        </p:nvCxnSpPr>
+        <p:spPr>
+          <a:xfrm>
+            <a:off x="1260000" y="943200"/>
+            <a:ext cx="1728000" cy="0"/>
+          </a:xfrm>
+          <a:prstGeom prst="line">
+            <a:avLst/>
+          </a:prstGeom>
+          <a:ln w="3600">
+            <a:solidFill>
+              <a:srgbClr val="FFE0EB"/>
+            </a:solidFill>
+          </a:ln>
+        </p:spPr>
+      </p:cxnSp>
+      <p:sp>
+        <p:nvSpPr>
+          <p:cNvPr id="10" name="텍스트"/>
+          <p:cNvSpPr txBox="1"/>
+          <p:nvPr/>
+        </p:nvSpPr>
+        <p:spPr>
+          <a:xfrm>
+            <a:off x="1260000" y="1054800"/>
+            <a:ext cx="331200" cy="91441"/>
+          </a:xfrm>
+          <a:prstGeom prst="rect">
+            <a:avLst/>
+          </a:prstGeom>
+          <a:noFill/>
+        </p:spPr>
+        <p:txBody>
+          <a:bodyPr wrap="square" lIns="0" rIns="0" tIns="0" bIns="0" anchor="t">
+            <a:spAutoFit/>
+          </a:bodyPr>
+          <a:lstStyle/>
+          <a:p>
+            <a:pPr algn="l">
+              <a:lnSpc>
+                <a:spcPts val="696"/>
+              </a:lnSpc>
+            </a:pPr>
+            <a:r>
+              <a:rPr sz="480" b="1" spc="140">
                 <a:solidFill>
                   <a:srgbClr val="6C4357"/>
                 </a:solidFill>
@@ -3348,14 +3399,14 @@
       </p:sp>
       <p:sp>
         <p:nvSpPr>
-          <p:cNvPr id="9" name="텍스트"/>
+          <p:cNvPr id="11" name="텍스트"/>
           <p:cNvSpPr txBox="1"/>
           <p:nvPr/>
         </p:nvSpPr>
         <p:spPr>
           <a:xfrm>
-            <a:off x="2023200" y="1317600"/>
-            <a:ext cx="1188000" cy="125731"/>
+            <a:off x="1591200" y="1044000"/>
+            <a:ext cx="1188000" cy="123826"/>
           </a:xfrm>
           <a:prstGeom prst="rect">
             <a:avLst/>
@@ -3370,11 +3421,11 @@
           <a:p>
             <a:pPr algn="l">
               <a:lnSpc>
-                <a:spcPts val="956"/>
+                <a:spcPts val="942"/>
               </a:lnSpc>
             </a:pPr>
             <a:r>
-              <a:rPr sz="660" b="0">
+              <a:rPr sz="650" b="0">
                 <a:solidFill>
                   <a:srgbClr val="12151C"/>
                 </a:solidFill>
@@ -3388,14 +3439,14 @@
       </p:sp>
       <p:sp>
         <p:nvSpPr>
-          <p:cNvPr id="10" name="텍스트"/>
+          <p:cNvPr id="12" name="텍스트"/>
           <p:cNvSpPr txBox="1"/>
           <p:nvPr/>
         </p:nvSpPr>
         <p:spPr>
           <a:xfrm>
-            <a:off x="1692000" y="1458000"/>
-            <a:ext cx="331200" cy="99061"/>
+            <a:off x="1260000" y="1184400"/>
+            <a:ext cx="331200" cy="91441"/>
           </a:xfrm>
           <a:prstGeom prst="rect">
             <a:avLst/>
@@ -3410,11 +3461,11 @@
           <a:p>
             <a:pPr algn="l">
               <a:lnSpc>
-                <a:spcPts val="754"/>
+                <a:spcPts val="696"/>
               </a:lnSpc>
             </a:pPr>
             <a:r>
-              <a:rPr sz="520" b="1" spc="120">
+              <a:rPr sz="480" b="1" spc="140">
                 <a:solidFill>
                   <a:srgbClr val="6C4357"/>
                 </a:solidFill>
@@ -3428,14 +3479,14 @@
       </p:sp>
       <p:sp>
         <p:nvSpPr>
-          <p:cNvPr id="11" name="텍스트"/>
+          <p:cNvPr id="13" name="텍스트"/>
           <p:cNvSpPr txBox="1"/>
           <p:nvPr/>
         </p:nvSpPr>
         <p:spPr>
           <a:xfrm>
-            <a:off x="2023200" y="1447200"/>
-            <a:ext cx="1188000" cy="125731"/>
+            <a:off x="1591200" y="1173600"/>
+            <a:ext cx="1188000" cy="123826"/>
           </a:xfrm>
           <a:prstGeom prst="rect">
             <a:avLst/>
@@ -3450,11 +3501,11 @@
           <a:p>
             <a:pPr algn="l">
               <a:lnSpc>
-                <a:spcPts val="956"/>
+                <a:spcPts val="942"/>
               </a:lnSpc>
             </a:pPr>
             <a:r>
-              <a:rPr sz="660" b="0">
+              <a:rPr sz="650" b="0">
                 <a:solidFill>
                   <a:srgbClr val="12151C"/>
                 </a:solidFill>
@@ -3468,14 +3519,14 @@
       </p:sp>
       <p:sp>
         <p:nvSpPr>
-          <p:cNvPr id="12" name="텍스트"/>
+          <p:cNvPr id="14" name="텍스트"/>
           <p:cNvSpPr txBox="1"/>
           <p:nvPr/>
         </p:nvSpPr>
         <p:spPr>
           <a:xfrm>
-            <a:off x="1692000" y="1587600"/>
-            <a:ext cx="331200" cy="99061"/>
+            <a:off x="1260000" y="1314000"/>
+            <a:ext cx="331200" cy="91441"/>
           </a:xfrm>
           <a:prstGeom prst="rect">
             <a:avLst/>
@@ -3490,11 +3541,11 @@
           <a:p>
             <a:pPr algn="l">
               <a:lnSpc>
-                <a:spcPts val="754"/>
+                <a:spcPts val="696"/>
               </a:lnSpc>
             </a:pPr>
             <a:r>
-              <a:rPr sz="520" b="1" spc="120">
+              <a:rPr sz="480" b="1" spc="140">
                 <a:solidFill>
                   <a:srgbClr val="6C4357"/>
                 </a:solidFill>
@@ -3508,14 +3559,14 @@
       </p:sp>
       <p:sp>
         <p:nvSpPr>
-          <p:cNvPr id="13" name="텍스트"/>
+          <p:cNvPr id="15" name="텍스트"/>
           <p:cNvSpPr txBox="1"/>
           <p:nvPr/>
         </p:nvSpPr>
         <p:spPr>
           <a:xfrm>
-            <a:off x="2023200" y="1576800"/>
-            <a:ext cx="1188000" cy="125731"/>
+            <a:off x="1591200" y="1303200"/>
+            <a:ext cx="1188000" cy="123826"/>
           </a:xfrm>
           <a:prstGeom prst="rect">
             <a:avLst/>
@@ -3530,11 +3581,11 @@
           <a:p>
             <a:pPr algn="l">
               <a:lnSpc>
-                <a:spcPts val="956"/>
+                <a:spcPts val="942"/>
               </a:lnSpc>
             </a:pPr>
             <a:r>
-              <a:rPr sz="660" b="0">
+              <a:rPr sz="650" b="0">
                 <a:solidFill>
                   <a:srgbClr val="12151C"/>
                 </a:solidFill>
@@ -3574,14 +3625,54 @@
       <p:grpSpPr/>
       <p:sp>
         <p:nvSpPr>
-          <p:cNvPr id="2" name="Rectangle 1"/>
+          <p:cNvPr id="2" name="텍스트"/>
+          <p:cNvSpPr txBox="1"/>
+          <p:nvPr/>
+        </p:nvSpPr>
+        <p:spPr>
+          <a:xfrm>
+            <a:off x="252000" y="252000"/>
+            <a:ext cx="1080000" cy="99061"/>
+          </a:xfrm>
+          <a:prstGeom prst="rect">
+            <a:avLst/>
+          </a:prstGeom>
+          <a:noFill/>
+        </p:spPr>
+        <p:txBody>
+          <a:bodyPr wrap="square" lIns="0" rIns="0" tIns="0" bIns="0" anchor="t">
+            <a:spAutoFit/>
+          </a:bodyPr>
+          <a:lstStyle/>
+          <a:p>
+            <a:pPr algn="l">
+              <a:lnSpc>
+                <a:spcPts val="754"/>
+              </a:lnSpc>
+            </a:pPr>
+            <a:r>
+              <a:rPr sz="520" b="1" spc="240">
+                <a:solidFill>
+                  <a:srgbClr val="A3A9B5"/>
+                </a:solidFill>
+                <a:latin typeface="맑은 고딕"/>
+                <a:ea typeface="맑은 고딕"/>
+              </a:rPr>
+              <a:t>수업 안내</a:t>
+            </a:r>
+          </a:p>
+        </p:txBody>
+      </p:sp>
+      <p:sp>
+        <p:nvSpPr>
+          <p:cNvPr id="3" name="Rectangle 2"/>
           <p:cNvSpPr/>
           <p:nvPr/>
         </p:nvSpPr>
         <p:spPr>
           <a:xfrm>
-            <a:off x="0" y="0"/>
-            <a:ext cx="3240000" cy="1800000"/>
+            <a:off x="252000" y="352800"/>
+            <a:ext cx="108000" cy="14400"/>
           </a:xfrm>
           <a:prstGeom prst="rect">
             <a:avLst/>
@@ -3601,109 +3692,447 @@
           </a:p>
         </p:txBody>
       </p:sp>
-      <p:sp>
-        <p:nvSpPr>
-          <p:cNvPr id="3" name="Freeform 2"/>
+      <p:cxnSp>
+        <p:nvCxnSpPr>
+          <p:cNvPr id="4" name="Connector 3"/>
+          <p:cNvCxnSpPr/>
+          <p:nvPr/>
+        </p:nvCxnSpPr>
+        <p:spPr>
+          <a:xfrm>
+            <a:off x="252000" y="453600"/>
+            <a:ext cx="1512000" cy="0"/>
+          </a:xfrm>
+          <a:prstGeom prst="line">
+            <a:avLst/>
+          </a:prstGeom>
+          <a:ln w="3600">
+            <a:solidFill>
+              <a:srgbClr val="2A2F38"/>
+            </a:solidFill>
+          </a:ln>
+        </p:spPr>
+      </p:cxnSp>
+      <p:sp>
+        <p:nvSpPr>
+          <p:cNvPr id="5" name="텍스트"/>
+          <p:cNvSpPr txBox="1"/>
+          <p:nvPr/>
+        </p:nvSpPr>
+        <p:spPr>
+          <a:xfrm>
+            <a:off x="252000" y="507600"/>
+            <a:ext cx="216000" cy="95251"/>
+          </a:xfrm>
+          <a:prstGeom prst="rect">
+            <a:avLst/>
+          </a:prstGeom>
+          <a:noFill/>
+        </p:spPr>
+        <p:txBody>
+          <a:bodyPr wrap="square" lIns="0" rIns="0" tIns="0" bIns="0" anchor="t">
+            <a:spAutoFit/>
+          </a:bodyPr>
+          <a:lstStyle/>
+          <a:p>
+            <a:pPr algn="l">
+              <a:lnSpc>
+                <a:spcPts val="725"/>
+              </a:lnSpc>
+            </a:pPr>
+            <a:r>
+              <a:rPr sz="500" b="1" spc="100">
+                <a:solidFill>
+                  <a:srgbClr val="A3A9B5"/>
+                </a:solidFill>
+                <a:latin typeface="맑은 고딕"/>
+                <a:ea typeface="맑은 고딕"/>
+              </a:rPr>
+              <a:t>01</a:t>
+            </a:r>
+          </a:p>
+        </p:txBody>
+      </p:sp>
+      <p:sp>
+        <p:nvSpPr>
+          <p:cNvPr id="6" name="텍스트"/>
+          <p:cNvSpPr txBox="1"/>
+          <p:nvPr/>
+        </p:nvSpPr>
+        <p:spPr>
+          <a:xfrm>
+            <a:off x="489600" y="496800"/>
+            <a:ext cx="1260000" cy="133351"/>
+          </a:xfrm>
+          <a:prstGeom prst="rect">
+            <a:avLst/>
+          </a:prstGeom>
+          <a:noFill/>
+        </p:spPr>
+        <p:txBody>
+          <a:bodyPr wrap="square" lIns="0" rIns="0" tIns="0" bIns="0" anchor="t">
+            <a:spAutoFit/>
+          </a:bodyPr>
+          <a:lstStyle/>
+          <a:p>
+            <a:pPr algn="l">
+              <a:lnSpc>
+                <a:spcPts val="1015"/>
+              </a:lnSpc>
+            </a:pPr>
+            <a:r>
+              <a:rPr sz="700" b="0">
+                <a:solidFill>
+                  <a:srgbClr val="FFFFFF"/>
+                </a:solidFill>
+                <a:latin typeface="맑은 고딕"/>
+                <a:ea typeface="맑은 고딕"/>
+              </a:rPr>
+              <a:t>사회</a:t>
+            </a:r>
+          </a:p>
+        </p:txBody>
+      </p:sp>
+      <p:cxnSp>
+        <p:nvCxnSpPr>
+          <p:cNvPr id="7" name="Connector 6"/>
+          <p:cNvCxnSpPr/>
+          <p:nvPr/>
+        </p:nvCxnSpPr>
+        <p:spPr>
+          <a:xfrm>
+            <a:off x="252000" y="640800"/>
+            <a:ext cx="1512000" cy="0"/>
+          </a:xfrm>
+          <a:prstGeom prst="line">
+            <a:avLst/>
+          </a:prstGeom>
+          <a:ln w="3600">
+            <a:solidFill>
+              <a:srgbClr val="2A2F38"/>
+            </a:solidFill>
+          </a:ln>
+        </p:spPr>
+      </p:cxnSp>
+      <p:sp>
+        <p:nvSpPr>
+          <p:cNvPr id="8" name="텍스트"/>
+          <p:cNvSpPr txBox="1"/>
+          <p:nvPr/>
+        </p:nvSpPr>
+        <p:spPr>
+          <a:xfrm>
+            <a:off x="252000" y="694800"/>
+            <a:ext cx="216000" cy="95251"/>
+          </a:xfrm>
+          <a:prstGeom prst="rect">
+            <a:avLst/>
+          </a:prstGeom>
+          <a:noFill/>
+        </p:spPr>
+        <p:txBody>
+          <a:bodyPr wrap="square" lIns="0" rIns="0" tIns="0" bIns="0" anchor="t">
+            <a:spAutoFit/>
+          </a:bodyPr>
+          <a:lstStyle/>
+          <a:p>
+            <a:pPr algn="l">
+              <a:lnSpc>
+                <a:spcPts val="725"/>
+              </a:lnSpc>
+            </a:pPr>
+            <a:r>
+              <a:rPr sz="500" b="1" spc="100">
+                <a:solidFill>
+                  <a:srgbClr val="A3A9B5"/>
+                </a:solidFill>
+                <a:latin typeface="맑은 고딕"/>
+                <a:ea typeface="맑은 고딕"/>
+              </a:rPr>
+              <a:t>02</a:t>
+            </a:r>
+          </a:p>
+        </p:txBody>
+      </p:sp>
+      <p:sp>
+        <p:nvSpPr>
+          <p:cNvPr id="9" name="텍스트"/>
+          <p:cNvSpPr txBox="1"/>
+          <p:nvPr/>
+        </p:nvSpPr>
+        <p:spPr>
+          <a:xfrm>
+            <a:off x="489600" y="684000"/>
+            <a:ext cx="1260000" cy="133351"/>
+          </a:xfrm>
+          <a:prstGeom prst="rect">
+            <a:avLst/>
+          </a:prstGeom>
+          <a:noFill/>
+        </p:spPr>
+        <p:txBody>
+          <a:bodyPr wrap="square" lIns="0" rIns="0" tIns="0" bIns="0" anchor="t">
+            <a:spAutoFit/>
+          </a:bodyPr>
+          <a:lstStyle/>
+          <a:p>
+            <a:pPr algn="l">
+              <a:lnSpc>
+                <a:spcPts val="1015"/>
+              </a:lnSpc>
+            </a:pPr>
+            <a:r>
+              <a:rPr sz="700" b="0">
+                <a:solidFill>
+                  <a:srgbClr val="FFFFFF"/>
+                </a:solidFill>
+                <a:latin typeface="맑은 고딕"/>
+                <a:ea typeface="맑은 고딕"/>
+              </a:rPr>
+              <a:t>미술</a:t>
+            </a:r>
+          </a:p>
+        </p:txBody>
+      </p:sp>
+      <p:cxnSp>
+        <p:nvCxnSpPr>
+          <p:cNvPr id="10" name="Connector 9"/>
+          <p:cNvCxnSpPr/>
+          <p:nvPr/>
+        </p:nvCxnSpPr>
+        <p:spPr>
+          <a:xfrm>
+            <a:off x="252000" y="828000"/>
+            <a:ext cx="1512000" cy="0"/>
+          </a:xfrm>
+          <a:prstGeom prst="line">
+            <a:avLst/>
+          </a:prstGeom>
+          <a:ln w="3600">
+            <a:solidFill>
+              <a:srgbClr val="2A2F38"/>
+            </a:solidFill>
+          </a:ln>
+        </p:spPr>
+      </p:cxnSp>
+      <p:sp>
+        <p:nvSpPr>
+          <p:cNvPr id="11" name="텍스트"/>
+          <p:cNvSpPr txBox="1"/>
+          <p:nvPr/>
+        </p:nvSpPr>
+        <p:spPr>
+          <a:xfrm>
+            <a:off x="252000" y="882000"/>
+            <a:ext cx="216000" cy="95251"/>
+          </a:xfrm>
+          <a:prstGeom prst="rect">
+            <a:avLst/>
+          </a:prstGeom>
+          <a:noFill/>
+        </p:spPr>
+        <p:txBody>
+          <a:bodyPr wrap="square" lIns="0" rIns="0" tIns="0" bIns="0" anchor="t">
+            <a:spAutoFit/>
+          </a:bodyPr>
+          <a:lstStyle/>
+          <a:p>
+            <a:pPr algn="l">
+              <a:lnSpc>
+                <a:spcPts val="725"/>
+              </a:lnSpc>
+            </a:pPr>
+            <a:r>
+              <a:rPr sz="500" b="1" spc="100">
+                <a:solidFill>
+                  <a:srgbClr val="A3A9B5"/>
+                </a:solidFill>
+                <a:latin typeface="맑은 고딕"/>
+                <a:ea typeface="맑은 고딕"/>
+              </a:rPr>
+              <a:t>03</a:t>
+            </a:r>
+          </a:p>
+        </p:txBody>
+      </p:sp>
+      <p:sp>
+        <p:nvSpPr>
+          <p:cNvPr id="12" name="텍스트"/>
+          <p:cNvSpPr txBox="1"/>
+          <p:nvPr/>
+        </p:nvSpPr>
+        <p:spPr>
+          <a:xfrm>
+            <a:off x="489600" y="871200"/>
+            <a:ext cx="1260000" cy="133351"/>
+          </a:xfrm>
+          <a:prstGeom prst="rect">
+            <a:avLst/>
+          </a:prstGeom>
+          <a:noFill/>
+        </p:spPr>
+        <p:txBody>
+          <a:bodyPr wrap="square" lIns="0" rIns="0" tIns="0" bIns="0" anchor="t">
+            <a:spAutoFit/>
+          </a:bodyPr>
+          <a:lstStyle/>
+          <a:p>
+            <a:pPr algn="l">
+              <a:lnSpc>
+                <a:spcPts val="1015"/>
+              </a:lnSpc>
+            </a:pPr>
+            <a:r>
+              <a:rPr sz="700" b="0">
+                <a:solidFill>
+                  <a:srgbClr val="FFFFFF"/>
+                </a:solidFill>
+                <a:latin typeface="맑은 고딕"/>
+                <a:ea typeface="맑은 고딕"/>
+              </a:rPr>
+              <a:t>피아노</a:t>
+            </a:r>
+          </a:p>
+        </p:txBody>
+      </p:sp>
+      <p:cxnSp>
+        <p:nvCxnSpPr>
+          <p:cNvPr id="13" name="Connector 12"/>
+          <p:cNvCxnSpPr/>
+          <p:nvPr/>
+        </p:nvCxnSpPr>
+        <p:spPr>
+          <a:xfrm>
+            <a:off x="252000" y="1015200"/>
+            <a:ext cx="1512000" cy="0"/>
+          </a:xfrm>
+          <a:prstGeom prst="line">
+            <a:avLst/>
+          </a:prstGeom>
+          <a:ln w="3600">
+            <a:solidFill>
+              <a:srgbClr val="2A2F38"/>
+            </a:solidFill>
+          </a:ln>
+        </p:spPr>
+      </p:cxnSp>
+      <p:sp>
+        <p:nvSpPr>
+          <p:cNvPr id="14" name="텍스트"/>
+          <p:cNvSpPr txBox="1"/>
+          <p:nvPr/>
+        </p:nvSpPr>
+        <p:spPr>
+          <a:xfrm>
+            <a:off x="252000" y="1069200"/>
+            <a:ext cx="216000" cy="95251"/>
+          </a:xfrm>
+          <a:prstGeom prst="rect">
+            <a:avLst/>
+          </a:prstGeom>
+          <a:noFill/>
+        </p:spPr>
+        <p:txBody>
+          <a:bodyPr wrap="square" lIns="0" rIns="0" tIns="0" bIns="0" anchor="t">
+            <a:spAutoFit/>
+          </a:bodyPr>
+          <a:lstStyle/>
+          <a:p>
+            <a:pPr algn="l">
+              <a:lnSpc>
+                <a:spcPts val="725"/>
+              </a:lnSpc>
+            </a:pPr>
+            <a:r>
+              <a:rPr sz="500" b="1" spc="100">
+                <a:solidFill>
+                  <a:srgbClr val="A3A9B5"/>
+                </a:solidFill>
+                <a:latin typeface="맑은 고딕"/>
+                <a:ea typeface="맑은 고딕"/>
+              </a:rPr>
+              <a:t>04</a:t>
+            </a:r>
+          </a:p>
+        </p:txBody>
+      </p:sp>
+      <p:sp>
+        <p:nvSpPr>
+          <p:cNvPr id="15" name="텍스트"/>
+          <p:cNvSpPr txBox="1"/>
+          <p:nvPr/>
+        </p:nvSpPr>
+        <p:spPr>
+          <a:xfrm>
+            <a:off x="489600" y="1058400"/>
+            <a:ext cx="1260000" cy="133351"/>
+          </a:xfrm>
+          <a:prstGeom prst="rect">
+            <a:avLst/>
+          </a:prstGeom>
+          <a:noFill/>
+        </p:spPr>
+        <p:txBody>
+          <a:bodyPr wrap="square" lIns="0" rIns="0" tIns="0" bIns="0" anchor="t">
+            <a:spAutoFit/>
+          </a:bodyPr>
+          <a:lstStyle/>
+          <a:p>
+            <a:pPr algn="l">
+              <a:lnSpc>
+                <a:spcPts val="1015"/>
+              </a:lnSpc>
+            </a:pPr>
+            <a:r>
+              <a:rPr sz="700" b="0">
+                <a:solidFill>
+                  <a:srgbClr val="FFFFFF"/>
+                </a:solidFill>
+                <a:latin typeface="맑은 고딕"/>
+                <a:ea typeface="맑은 고딕"/>
+              </a:rPr>
+              <a:t>학부모 상담</a:t>
+            </a:r>
+          </a:p>
+        </p:txBody>
+      </p:sp>
+      <p:cxnSp>
+        <p:nvCxnSpPr>
+          <p:cNvPr id="16" name="Connector 15"/>
+          <p:cNvCxnSpPr/>
+          <p:nvPr/>
+        </p:nvCxnSpPr>
+        <p:spPr>
+          <a:xfrm>
+            <a:off x="252000" y="1202400"/>
+            <a:ext cx="1512000" cy="0"/>
+          </a:xfrm>
+          <a:prstGeom prst="line">
+            <a:avLst/>
+          </a:prstGeom>
+          <a:ln w="3600">
+            <a:solidFill>
+              <a:srgbClr val="2A2F38"/>
+            </a:solidFill>
+          </a:ln>
+        </p:spPr>
+      </p:cxnSp>
+      <p:sp>
+        <p:nvSpPr>
+          <p:cNvPr id="17" name="Rectangle 16"/>
           <p:cNvSpPr/>
           <p:nvPr/>
         </p:nvSpPr>
         <p:spPr>
           <a:xfrm>
-            <a:off x="2412000" y="972000"/>
-            <a:ext cx="828000" cy="828000"/>
-          </a:xfrm>
-          <a:custGeom>
+            <a:off x="2088000" y="252000"/>
+            <a:ext cx="900000" cy="1296000"/>
+          </a:xfrm>
+          <a:prstGeom prst="rect">
             <a:avLst/>
-            <a:gdLst/>
-            <a:ahLst/>
-            <a:cxnLst/>
-            <a:rect l="l" t="t" r="r" b="b"/>
-            <a:pathLst>
-              <a:path w="828000" h="828000">
-                <a:moveTo>
-                  <a:pt x="828000" y="828000"/>
-                </a:moveTo>
-                <a:lnTo>
-                  <a:pt x="0" y="828000"/>
-                </a:lnTo>
-                <a:lnTo>
-                  <a:pt x="1773" y="773846"/>
-                </a:lnTo>
-                <a:lnTo>
-                  <a:pt x="7084" y="719924"/>
-                </a:lnTo>
-                <a:lnTo>
-                  <a:pt x="15910" y="666465"/>
-                </a:lnTo>
-                <a:lnTo>
-                  <a:pt x="28213" y="613698"/>
-                </a:lnTo>
-                <a:lnTo>
-                  <a:pt x="43942" y="561848"/>
-                </a:lnTo>
-                <a:lnTo>
-                  <a:pt x="63028" y="511138"/>
-                </a:lnTo>
-                <a:lnTo>
-                  <a:pt x="85389" y="461785"/>
-                </a:lnTo>
-                <a:lnTo>
-                  <a:pt x="110931" y="414000"/>
-                </a:lnTo>
-                <a:lnTo>
-                  <a:pt x="139543" y="367988"/>
-                </a:lnTo>
-                <a:lnTo>
-                  <a:pt x="171103" y="323946"/>
-                </a:lnTo>
-                <a:lnTo>
-                  <a:pt x="205477" y="282062"/>
-                </a:lnTo>
-                <a:lnTo>
-                  <a:pt x="242516" y="242516"/>
-                </a:lnTo>
-                <a:lnTo>
-                  <a:pt x="282062" y="205477"/>
-                </a:lnTo>
-                <a:lnTo>
-                  <a:pt x="323946" y="171103"/>
-                </a:lnTo>
-                <a:lnTo>
-                  <a:pt x="367988" y="139543"/>
-                </a:lnTo>
-                <a:lnTo>
-                  <a:pt x="414000" y="110931"/>
-                </a:lnTo>
-                <a:lnTo>
-                  <a:pt x="461785" y="85389"/>
-                </a:lnTo>
-                <a:lnTo>
-                  <a:pt x="511138" y="63028"/>
-                </a:lnTo>
-                <a:lnTo>
-                  <a:pt x="561848" y="43942"/>
-                </a:lnTo>
-                <a:lnTo>
-                  <a:pt x="613698" y="28213"/>
-                </a:lnTo>
-                <a:lnTo>
-                  <a:pt x="666465" y="15910"/>
-                </a:lnTo>
-                <a:lnTo>
-                  <a:pt x="719924" y="7084"/>
-                </a:lnTo>
-                <a:lnTo>
-                  <a:pt x="773846" y="1773"/>
-                </a:lnTo>
-                <a:lnTo>
-                  <a:pt x="828000" y="0"/>
-                </a:lnTo>
-                <a:close/>
-              </a:path>
-            </a:pathLst>
-          </a:custGeom>
+          </a:prstGeom>
           <a:solidFill>
-            <a:srgbClr val="FFA8C8"/>
+            <a:srgbClr val="FF8FB8"/>
           </a:solidFill>
           <a:ln>
             <a:noFill/>
@@ -3719,14 +4148,14 @@
       </p:sp>
       <p:sp>
         <p:nvSpPr>
-          <p:cNvPr id="4" name="텍스트"/>
+          <p:cNvPr id="18" name="텍스트"/>
           <p:cNvSpPr txBox="1"/>
           <p:nvPr/>
         </p:nvSpPr>
         <p:spPr>
           <a:xfrm>
-            <a:off x="252000" y="432000"/>
-            <a:ext cx="2304000" cy="720000"/>
+            <a:off x="2196000" y="360000"/>
+            <a:ext cx="684000" cy="95251"/>
           </a:xfrm>
           <a:prstGeom prst="rect">
             <a:avLst/>
@@ -3741,49 +4170,177 @@
           <a:p>
             <a:pPr algn="l">
               <a:lnSpc>
-                <a:spcPts val="1884"/>
+                <a:spcPts val="725"/>
               </a:lnSpc>
             </a:pPr>
             <a:r>
-              <a:rPr sz="1300" b="1">
+              <a:rPr sz="500" b="1" spc="240">
+                <a:solidFill>
+                  <a:srgbClr val="12151C">
+                    <a:alpha val="75000"/>
+                  </a:srgbClr>
+                </a:solidFill>
+                <a:latin typeface="맑은 고딕"/>
+                <a:ea typeface="맑은 고딕"/>
+              </a:rPr>
+              <a:t>INFO</a:t>
+            </a:r>
+          </a:p>
+        </p:txBody>
+      </p:sp>
+      <p:sp>
+        <p:nvSpPr>
+          <p:cNvPr id="19" name="텍스트"/>
+          <p:cNvSpPr txBox="1"/>
+          <p:nvPr/>
+        </p:nvSpPr>
+        <p:spPr>
+          <a:xfrm>
+            <a:off x="2196000" y="504000"/>
+            <a:ext cx="684000" cy="121921"/>
+          </a:xfrm>
+          <a:prstGeom prst="rect">
+            <a:avLst/>
+          </a:prstGeom>
+          <a:noFill/>
+        </p:spPr>
+        <p:txBody>
+          <a:bodyPr wrap="square" lIns="0" rIns="0" tIns="0" bIns="0" anchor="t">
+            <a:spAutoFit/>
+          </a:bodyPr>
+          <a:lstStyle/>
+          <a:p>
+            <a:pPr algn="l">
+              <a:lnSpc>
+                <a:spcPts val="927"/>
+              </a:lnSpc>
+            </a:pPr>
+            <a:r>
+              <a:rPr sz="640" b="1">
                 <a:solidFill>
                   <a:srgbClr val="12151C"/>
                 </a:solidFill>
                 <a:latin typeface="맑은 고딕"/>
                 <a:ea typeface="맑은 고딕"/>
               </a:rPr>
-              <a:t>눈높이를 맞추는</a:t>
-            </a:r>
-          </a:p>
+              <a:t>평일 13:00 – 21:00</a:t>
+            </a:r>
+          </a:p>
+        </p:txBody>
+      </p:sp>
+      <p:cxnSp>
+        <p:nvCxnSpPr>
+          <p:cNvPr id="20" name="Connector 19"/>
+          <p:cNvCxnSpPr/>
+          <p:nvPr/>
+        </p:nvCxnSpPr>
+        <p:spPr>
+          <a:xfrm>
+            <a:off x="2196000" y="770400"/>
+            <a:ext cx="684000" cy="0"/>
+          </a:xfrm>
+          <a:prstGeom prst="line">
+            <a:avLst/>
+          </a:prstGeom>
+          <a:ln w="3600">
+            <a:solidFill>
+              <a:srgbClr val="12151C"/>
+            </a:solidFill>
+          </a:ln>
+        </p:spPr>
+      </p:cxnSp>
+      <p:sp>
+        <p:nvSpPr>
+          <p:cNvPr id="21" name="텍스트"/>
+          <p:cNvSpPr txBox="1"/>
+          <p:nvPr/>
+        </p:nvSpPr>
+        <p:spPr>
+          <a:xfrm>
+            <a:off x="2196000" y="849600"/>
+            <a:ext cx="684000" cy="91441"/>
+          </a:xfrm>
+          <a:prstGeom prst="rect">
+            <a:avLst/>
+          </a:prstGeom>
+          <a:noFill/>
+        </p:spPr>
+        <p:txBody>
+          <a:bodyPr wrap="square" lIns="0" rIns="0" tIns="0" bIns="0" anchor="t">
+            <a:spAutoFit/>
+          </a:bodyPr>
+          <a:lstStyle/>
           <a:p>
             <a:pPr algn="l">
               <a:lnSpc>
-                <a:spcPts val="1884"/>
+                <a:spcPts val="696"/>
               </a:lnSpc>
             </a:pPr>
             <a:r>
-              <a:rPr sz="1300" b="1">
+              <a:rPr sz="480" b="1" spc="140">
+                <a:solidFill>
+                  <a:srgbClr val="12151C">
+                    <a:alpha val="75000"/>
+                  </a:srgbClr>
+                </a:solidFill>
+                <a:latin typeface="맑은 고딕"/>
+                <a:ea typeface="맑은 고딕"/>
+              </a:rPr>
+              <a:t>KAKAO</a:t>
+            </a:r>
+          </a:p>
+        </p:txBody>
+      </p:sp>
+      <p:sp>
+        <p:nvSpPr>
+          <p:cNvPr id="22" name="텍스트"/>
+          <p:cNvSpPr txBox="1"/>
+          <p:nvPr/>
+        </p:nvSpPr>
+        <p:spPr>
+          <a:xfrm>
+            <a:off x="2196000" y="957600"/>
+            <a:ext cx="684000" cy="121921"/>
+          </a:xfrm>
+          <a:prstGeom prst="rect">
+            <a:avLst/>
+          </a:prstGeom>
+          <a:noFill/>
+        </p:spPr>
+        <p:txBody>
+          <a:bodyPr wrap="square" lIns="0" rIns="0" tIns="0" bIns="0" anchor="t">
+            <a:spAutoFit/>
+          </a:bodyPr>
+          <a:lstStyle/>
+          <a:p>
+            <a:pPr algn="l">
+              <a:lnSpc>
+                <a:spcPts val="927"/>
+              </a:lnSpc>
+            </a:pPr>
+            <a:r>
+              <a:rPr sz="640" b="1">
                 <a:solidFill>
                   <a:srgbClr val="12151C"/>
                 </a:solidFill>
                 <a:latin typeface="맑은 고딕"/>
                 <a:ea typeface="맑은 고딕"/>
               </a:rPr>
-              <a:t>일이 시작입니다</a:t>
-            </a:r>
-          </a:p>
-        </p:txBody>
-      </p:sp>
-      <p:sp>
-        <p:nvSpPr>
-          <p:cNvPr id="5" name="텍스트"/>
+              <a:t>@채널아이디</a:t>
+            </a:r>
+          </a:p>
+        </p:txBody>
+      </p:sp>
+      <p:sp>
+        <p:nvSpPr>
+          <p:cNvPr id="23" name="텍스트"/>
           <p:cNvSpPr txBox="1"/>
           <p:nvPr/>
         </p:nvSpPr>
         <p:spPr>
           <a:xfrm>
-            <a:off x="252000" y="1476000"/>
-            <a:ext cx="1800000" cy="133351"/>
+            <a:off x="2196000" y="1368000"/>
+            <a:ext cx="720000" cy="106681"/>
           </a:xfrm>
           <a:prstGeom prst="rect">
             <a:avLst/>
@@ -3798,11 +4355,11 @@
           <a:p>
             <a:pPr algn="l">
               <a:lnSpc>
-                <a:spcPts val="1015"/>
+                <a:spcPts val="811"/>
               </a:lnSpc>
             </a:pPr>
             <a:r>
-              <a:rPr sz="700" b="1" spc="200">
+              <a:rPr sz="560" b="1" spc="80">
                 <a:solidFill>
                   <a:srgbClr val="12151C"/>
                 </a:solidFill>
